--- a/Reporte 270726.pptx
+++ b/Reporte 270726.pptx
@@ -7251,10 +7251,10 @@
       </p:sp>
       <p:pic>
         <p:nvPicPr>
-          <p:cNvPr id="5" name="Imagen 4">
+          <p:cNvPr id="3" name="Imagen 2">
             <a:extLst>
               <a:ext uri="{FF2B5EF4-FFF2-40B4-BE49-F238E27FC236}">
-                <a16:creationId xmlns:a16="http://schemas.microsoft.com/office/drawing/2014/main" id="{BCF93B33-039F-FBE0-0FE8-23E669846891}"/>
+                <a16:creationId xmlns:a16="http://schemas.microsoft.com/office/drawing/2014/main" id="{AA5D1D51-8D64-568A-F447-F4B724053321}"/>
               </a:ext>
             </a:extLst>
           </p:cNvPr>
@@ -7271,8 +7271,8 @@
         </p:blipFill>
         <p:spPr>
           <a:xfrm>
-            <a:off x="0" y="959156"/>
-            <a:ext cx="9144000" cy="3368064"/>
+            <a:off x="0" y="934859"/>
+            <a:ext cx="9144000" cy="3416657"/>
           </a:xfrm>
           <a:prstGeom prst="rect">
             <a:avLst/>
@@ -7365,10 +7365,10 @@
       </p:sp>
       <p:pic>
         <p:nvPicPr>
-          <p:cNvPr id="3" name="Imagen 2">
+          <p:cNvPr id="4" name="Imagen 3">
             <a:extLst>
               <a:ext uri="{FF2B5EF4-FFF2-40B4-BE49-F238E27FC236}">
-                <a16:creationId xmlns:a16="http://schemas.microsoft.com/office/drawing/2014/main" id="{F97368CE-33AB-2516-42F0-5FEDE5C1FBEC}"/>
+                <a16:creationId xmlns:a16="http://schemas.microsoft.com/office/drawing/2014/main" id="{0F586774-10AC-8B29-E902-23F4782F3D96}"/>
               </a:ext>
             </a:extLst>
           </p:cNvPr>
@@ -7385,8 +7385,8 @@
         </p:blipFill>
         <p:spPr>
           <a:xfrm>
-            <a:off x="0" y="1405971"/>
-            <a:ext cx="9144000" cy="2474434"/>
+            <a:off x="0" y="1403070"/>
+            <a:ext cx="9144000" cy="2480235"/>
           </a:xfrm>
           <a:prstGeom prst="rect">
             <a:avLst/>
@@ -7479,10 +7479,10 @@
       </p:sp>
       <p:pic>
         <p:nvPicPr>
-          <p:cNvPr id="2" name="Imagen 1">
+          <p:cNvPr id="3" name="Imagen 2">
             <a:extLst>
               <a:ext uri="{FF2B5EF4-FFF2-40B4-BE49-F238E27FC236}">
-                <a16:creationId xmlns:a16="http://schemas.microsoft.com/office/drawing/2014/main" id="{6A48C07B-E9D1-B14A-4FB1-792F5FAB20CD}"/>
+                <a16:creationId xmlns:a16="http://schemas.microsoft.com/office/drawing/2014/main" id="{A041737B-6B5E-AE12-DBC6-1ECBB0E3D47D}"/>
               </a:ext>
             </a:extLst>
           </p:cNvPr>
@@ -7499,8 +7499,8 @@
         </p:blipFill>
         <p:spPr>
           <a:xfrm>
-            <a:off x="550382" y="634658"/>
-            <a:ext cx="7970212" cy="4017060"/>
+            <a:off x="1106488" y="914940"/>
+            <a:ext cx="6858000" cy="3456495"/>
           </a:xfrm>
           <a:prstGeom prst="rect">
             <a:avLst/>
@@ -7589,10 +7589,10 @@
       </p:sp>
       <p:pic>
         <p:nvPicPr>
-          <p:cNvPr id="4" name="Imagen 3">
+          <p:cNvPr id="3" name="Imagen 2">
             <a:extLst>
               <a:ext uri="{FF2B5EF4-FFF2-40B4-BE49-F238E27FC236}">
-                <a16:creationId xmlns:a16="http://schemas.microsoft.com/office/drawing/2014/main" id="{DD057D6D-BC62-A4A7-0F1F-A6A2DD632A63}"/>
+                <a16:creationId xmlns:a16="http://schemas.microsoft.com/office/drawing/2014/main" id="{D02A6287-FA39-2DE5-164F-163BE0328F6B}"/>
               </a:ext>
             </a:extLst>
           </p:cNvPr>
@@ -7609,8 +7609,8 @@
         </p:blipFill>
         <p:spPr>
           <a:xfrm>
-            <a:off x="599520" y="661721"/>
-            <a:ext cx="7944959" cy="3820058"/>
+            <a:off x="563007" y="685527"/>
+            <a:ext cx="7944959" cy="3915321"/>
           </a:xfrm>
           <a:prstGeom prst="rect">
             <a:avLst/>
@@ -7703,10 +7703,10 @@
       </p:sp>
       <p:pic>
         <p:nvPicPr>
-          <p:cNvPr id="4" name="Imagen 3">
+          <p:cNvPr id="3" name="Imagen 2">
             <a:extLst>
               <a:ext uri="{FF2B5EF4-FFF2-40B4-BE49-F238E27FC236}">
-                <a16:creationId xmlns:a16="http://schemas.microsoft.com/office/drawing/2014/main" id="{CDA22620-4225-7ABD-D1C1-E122F01F932A}"/>
+                <a16:creationId xmlns:a16="http://schemas.microsoft.com/office/drawing/2014/main" id="{246167E6-5F08-BD6C-A24D-DFBE5FBA958C}"/>
               </a:ext>
             </a:extLst>
           </p:cNvPr>
@@ -7723,8 +7723,8 @@
         </p:blipFill>
         <p:spPr>
           <a:xfrm>
-            <a:off x="0" y="999442"/>
-            <a:ext cx="9144000" cy="3389416"/>
+            <a:off x="0" y="944734"/>
+            <a:ext cx="9144000" cy="3396907"/>
           </a:xfrm>
           <a:prstGeom prst="rect">
             <a:avLst/>
@@ -7817,10 +7817,10 @@
       </p:sp>
       <p:pic>
         <p:nvPicPr>
-          <p:cNvPr id="2" name="Imagen 1">
+          <p:cNvPr id="3" name="Imagen 2">
             <a:extLst>
               <a:ext uri="{FF2B5EF4-FFF2-40B4-BE49-F238E27FC236}">
-                <a16:creationId xmlns:a16="http://schemas.microsoft.com/office/drawing/2014/main" id="{0BF1F805-93D5-B868-422D-D3B86101F8C5}"/>
+                <a16:creationId xmlns:a16="http://schemas.microsoft.com/office/drawing/2014/main" id="{541F3D17-1AE6-9A6B-7C81-883F59EA4F22}"/>
               </a:ext>
             </a:extLst>
           </p:cNvPr>
@@ -7837,8 +7837,8 @@
         </p:blipFill>
         <p:spPr>
           <a:xfrm>
-            <a:off x="543239" y="631058"/>
-            <a:ext cx="7984497" cy="4024260"/>
+            <a:off x="1143000" y="914940"/>
+            <a:ext cx="6858000" cy="3456495"/>
           </a:xfrm>
           <a:prstGeom prst="rect">
             <a:avLst/>
@@ -7929,36 +7929,6 @@
           </a:p>
         </p:txBody>
       </p:sp>
-      <p:pic>
-        <p:nvPicPr>
-          <p:cNvPr id="2" name="Imagen 1">
-            <a:extLst>
-              <a:ext uri="{FF2B5EF4-FFF2-40B4-BE49-F238E27FC236}">
-                <a16:creationId xmlns:a16="http://schemas.microsoft.com/office/drawing/2014/main" id="{6EBC502C-33C7-91B4-B835-8F13F053EFB9}"/>
-              </a:ext>
-            </a:extLst>
-          </p:cNvPr>
-          <p:cNvPicPr>
-            <a:picLocks noChangeAspect="1"/>
-          </p:cNvPicPr>
-          <p:nvPr/>
-        </p:nvPicPr>
-        <p:blipFill>
-          <a:blip r:embed="rId2"/>
-          <a:stretch>
-            <a:fillRect/>
-          </a:stretch>
-        </p:blipFill>
-        <p:spPr>
-          <a:xfrm>
-            <a:off x="1106488" y="914940"/>
-            <a:ext cx="6858000" cy="3456495"/>
-          </a:xfrm>
-          <a:prstGeom prst="rect">
-            <a:avLst/>
-          </a:prstGeom>
-        </p:spPr>
-      </p:pic>
     </p:spTree>
     <p:extLst>
       <p:ext uri="{BB962C8B-B14F-4D97-AF65-F5344CB8AC3E}">
@@ -8039,36 +8009,6 @@
           </a:p>
         </p:txBody>
       </p:sp>
-      <p:pic>
-        <p:nvPicPr>
-          <p:cNvPr id="3" name="Imagen 2">
-            <a:extLst>
-              <a:ext uri="{FF2B5EF4-FFF2-40B4-BE49-F238E27FC236}">
-                <a16:creationId xmlns:a16="http://schemas.microsoft.com/office/drawing/2014/main" id="{EA0F26D3-DA5E-C3C3-EA6B-329D5302413C}"/>
-              </a:ext>
-            </a:extLst>
-          </p:cNvPr>
-          <p:cNvPicPr>
-            <a:picLocks noChangeAspect="1"/>
-          </p:cNvPicPr>
-          <p:nvPr/>
-        </p:nvPicPr>
-        <p:blipFill>
-          <a:blip r:embed="rId3"/>
-          <a:stretch>
-            <a:fillRect/>
-          </a:stretch>
-        </p:blipFill>
-        <p:spPr>
-          <a:xfrm>
-            <a:off x="0" y="1544727"/>
-            <a:ext cx="9144000" cy="2054045"/>
-          </a:xfrm>
-          <a:prstGeom prst="rect">
-            <a:avLst/>
-          </a:prstGeom>
-        </p:spPr>
-      </p:pic>
     </p:spTree>
     <p:extLst>
       <p:ext uri="{BB962C8B-B14F-4D97-AF65-F5344CB8AC3E}">

--- a/Reporte 270726.pptx
+++ b/Reporte 270726.pptx
@@ -6575,10 +6575,10 @@
       </p:sp>
       <p:pic>
         <p:nvPicPr>
-          <p:cNvPr id="5" name="Imagen 4">
+          <p:cNvPr id="4" name="Imagen 3">
             <a:extLst>
               <a:ext uri="{FF2B5EF4-FFF2-40B4-BE49-F238E27FC236}">
-                <a16:creationId xmlns:a16="http://schemas.microsoft.com/office/drawing/2014/main" id="{251CAB75-5DA5-F17A-30C0-3ED7806308BF}"/>
+                <a16:creationId xmlns:a16="http://schemas.microsoft.com/office/drawing/2014/main" id="{3E064897-1B3E-40EA-97AB-875095B9B7A0}"/>
               </a:ext>
             </a:extLst>
           </p:cNvPr>
@@ -6595,8 +6595,8 @@
         </p:blipFill>
         <p:spPr>
           <a:xfrm>
-            <a:off x="-6725" y="998955"/>
-            <a:ext cx="9144000" cy="3404789"/>
+            <a:off x="0" y="894996"/>
+            <a:ext cx="9144000" cy="3496384"/>
           </a:xfrm>
           <a:prstGeom prst="rect">
             <a:avLst/>
@@ -6673,10 +6673,10 @@
       </p:sp>
       <p:pic>
         <p:nvPicPr>
-          <p:cNvPr id="3" name="Imagen 2">
+          <p:cNvPr id="4" name="Imagen 3">
             <a:extLst>
               <a:ext uri="{FF2B5EF4-FFF2-40B4-BE49-F238E27FC236}">
-                <a16:creationId xmlns:a16="http://schemas.microsoft.com/office/drawing/2014/main" id="{7A12F929-F2AE-A43B-EEAC-ACEC23677293}"/>
+                <a16:creationId xmlns:a16="http://schemas.microsoft.com/office/drawing/2014/main" id="{4ABB8E6A-F54B-5A99-5E16-D50E76D7269A}"/>
               </a:ext>
             </a:extLst>
           </p:cNvPr>
@@ -6693,8 +6693,8 @@
         </p:blipFill>
         <p:spPr>
           <a:xfrm>
-            <a:off x="-6725" y="1352479"/>
-            <a:ext cx="9144000" cy="2581418"/>
+            <a:off x="0" y="1324928"/>
+            <a:ext cx="9144000" cy="2636520"/>
           </a:xfrm>
           <a:prstGeom prst="rect">
             <a:avLst/>
@@ -6777,10 +6777,10 @@
       </p:sp>
       <p:pic>
         <p:nvPicPr>
-          <p:cNvPr id="3" name="Imagen 2">
+          <p:cNvPr id="4" name="Imagen 3">
             <a:extLst>
               <a:ext uri="{FF2B5EF4-FFF2-40B4-BE49-F238E27FC236}">
-                <a16:creationId xmlns:a16="http://schemas.microsoft.com/office/drawing/2014/main" id="{BA403DB7-C9E3-5DAC-63E4-E9D2CF54A627}"/>
+                <a16:creationId xmlns:a16="http://schemas.microsoft.com/office/drawing/2014/main" id="{6E21EA75-856D-277B-1A9B-8BA334F0B9C4}"/>
               </a:ext>
             </a:extLst>
           </p:cNvPr>
@@ -6797,8 +6797,8 @@
         </p:blipFill>
         <p:spPr>
           <a:xfrm>
-            <a:off x="0" y="826411"/>
-            <a:ext cx="9144000" cy="3633554"/>
+            <a:off x="0" y="1004437"/>
+            <a:ext cx="9144000" cy="3277501"/>
           </a:xfrm>
           <a:prstGeom prst="rect">
             <a:avLst/>
@@ -6875,10 +6875,10 @@
       </p:sp>
       <p:pic>
         <p:nvPicPr>
-          <p:cNvPr id="5" name="Imagen 4">
+          <p:cNvPr id="4" name="Imagen 3">
             <a:extLst>
               <a:ext uri="{FF2B5EF4-FFF2-40B4-BE49-F238E27FC236}">
-                <a16:creationId xmlns:a16="http://schemas.microsoft.com/office/drawing/2014/main" id="{FA66E44C-1617-51DF-A2B7-DCCB4E32D774}"/>
+                <a16:creationId xmlns:a16="http://schemas.microsoft.com/office/drawing/2014/main" id="{47AC26AB-4849-FBE0-A3B4-D16F6A737174}"/>
               </a:ext>
             </a:extLst>
           </p:cNvPr>
@@ -6895,8 +6895,8 @@
         </p:blipFill>
         <p:spPr>
           <a:xfrm>
-            <a:off x="0" y="1357550"/>
-            <a:ext cx="9144000" cy="2571275"/>
+            <a:off x="0" y="1257657"/>
+            <a:ext cx="9144000" cy="2771062"/>
           </a:xfrm>
           <a:prstGeom prst="rect">
             <a:avLst/>
@@ -6973,10 +6973,10 @@
       </p:sp>
       <p:pic>
         <p:nvPicPr>
-          <p:cNvPr id="3" name="Imagen 2">
+          <p:cNvPr id="4" name="Imagen 3">
             <a:extLst>
               <a:ext uri="{FF2B5EF4-FFF2-40B4-BE49-F238E27FC236}">
-                <a16:creationId xmlns:a16="http://schemas.microsoft.com/office/drawing/2014/main" id="{2190AF2E-0ECB-B794-3212-F8FA1CFEDD67}"/>
+                <a16:creationId xmlns:a16="http://schemas.microsoft.com/office/drawing/2014/main" id="{B25CC990-7072-8460-970B-D6E11D402120}"/>
               </a:ext>
             </a:extLst>
           </p:cNvPr>
@@ -6993,8 +6993,8 @@
         </p:blipFill>
         <p:spPr>
           <a:xfrm>
-            <a:off x="-1" y="700404"/>
-            <a:ext cx="9144000" cy="3885567"/>
+            <a:off x="0" y="707319"/>
+            <a:ext cx="9144000" cy="3871738"/>
           </a:xfrm>
           <a:prstGeom prst="rect">
             <a:avLst/>
@@ -7077,10 +7077,10 @@
       </p:sp>
       <p:pic>
         <p:nvPicPr>
-          <p:cNvPr id="4" name="Imagen 3">
+          <p:cNvPr id="3" name="Imagen 2">
             <a:extLst>
               <a:ext uri="{FF2B5EF4-FFF2-40B4-BE49-F238E27FC236}">
-                <a16:creationId xmlns:a16="http://schemas.microsoft.com/office/drawing/2014/main" id="{2AD42CBC-2D84-2E95-FBAE-293638C806BE}"/>
+                <a16:creationId xmlns:a16="http://schemas.microsoft.com/office/drawing/2014/main" id="{2CCC40BF-1128-16AB-54F3-9A3922A0C310}"/>
               </a:ext>
             </a:extLst>
           </p:cNvPr>
@@ -7097,8 +7097,8 @@
         </p:blipFill>
         <p:spPr>
           <a:xfrm>
-            <a:off x="0" y="1117486"/>
-            <a:ext cx="9144000" cy="2908527"/>
+            <a:off x="0" y="774021"/>
+            <a:ext cx="9144000" cy="3738334"/>
           </a:xfrm>
           <a:prstGeom prst="rect">
             <a:avLst/>
@@ -7929,6 +7929,36 @@
           </a:p>
         </p:txBody>
       </p:sp>
+      <p:pic>
+        <p:nvPicPr>
+          <p:cNvPr id="3" name="Imagen 2">
+            <a:extLst>
+              <a:ext uri="{FF2B5EF4-FFF2-40B4-BE49-F238E27FC236}">
+                <a16:creationId xmlns:a16="http://schemas.microsoft.com/office/drawing/2014/main" id="{363849C1-DE0E-5A2F-22E8-97D9F3786A03}"/>
+              </a:ext>
+            </a:extLst>
+          </p:cNvPr>
+          <p:cNvPicPr>
+            <a:picLocks noChangeAspect="1"/>
+          </p:cNvPicPr>
+          <p:nvPr/>
+        </p:nvPicPr>
+        <p:blipFill>
+          <a:blip r:embed="rId2"/>
+          <a:stretch>
+            <a:fillRect/>
+          </a:stretch>
+        </p:blipFill>
+        <p:spPr>
+          <a:xfrm>
+            <a:off x="586095" y="652658"/>
+            <a:ext cx="7898785" cy="3981060"/>
+          </a:xfrm>
+          <a:prstGeom prst="rect">
+            <a:avLst/>
+          </a:prstGeom>
+        </p:spPr>
+      </p:pic>
     </p:spTree>
     <p:extLst>
       <p:ext uri="{BB962C8B-B14F-4D97-AF65-F5344CB8AC3E}">
@@ -8009,6 +8039,36 @@
           </a:p>
         </p:txBody>
       </p:sp>
+      <p:pic>
+        <p:nvPicPr>
+          <p:cNvPr id="3" name="Imagen 2">
+            <a:extLst>
+              <a:ext uri="{FF2B5EF4-FFF2-40B4-BE49-F238E27FC236}">
+                <a16:creationId xmlns:a16="http://schemas.microsoft.com/office/drawing/2014/main" id="{EC328E95-DAB1-E47B-B648-AA8D052F8CF5}"/>
+              </a:ext>
+            </a:extLst>
+          </p:cNvPr>
+          <p:cNvPicPr>
+            <a:picLocks noChangeAspect="1"/>
+          </p:cNvPicPr>
+          <p:nvPr/>
+        </p:nvPicPr>
+        <p:blipFill>
+          <a:blip r:embed="rId3"/>
+          <a:stretch>
+            <a:fillRect/>
+          </a:stretch>
+        </p:blipFill>
+        <p:spPr>
+          <a:xfrm>
+            <a:off x="448691" y="895106"/>
+            <a:ext cx="8173591" cy="3496163"/>
+          </a:xfrm>
+          <a:prstGeom prst="rect">
+            <a:avLst/>
+          </a:prstGeom>
+        </p:spPr>
+      </p:pic>
     </p:spTree>
     <p:extLst>
       <p:ext uri="{BB962C8B-B14F-4D97-AF65-F5344CB8AC3E}">
